--- a/skills/presentations/assets/pptx/examples/06-resource-request.pptx
+++ b/skills/presentations/assets/pptx/examples/06-resource-request.pptx
@@ -5,15 +5,15 @@
     <p:sldMasterId xmlns:r="http://schemas.openxmlformats.org/officeDocument/2006/relationships" id="2147483648" r:id="rId1"/>
   </p:sldMasterIdLst>
   <p:notesMasterIdLst>
-    <p:notesMasterId r:id="R0c788e5856694419"/>
+    <p:notesMasterId r:id="R7685342403384de0"/>
   </p:notesMasterIdLst>
   <p:sldIdLst>
-    <p:sldId id="256" r:id="Rc3322455ff744265"/>
-    <p:sldId id="257" r:id="R678ca9dba8684887"/>
-    <p:sldId id="258" r:id="Re6bdd3e80a7f416e"/>
-    <p:sldId id="259" r:id="R7f6d8f761ecb48cc"/>
-    <p:sldId id="260" r:id="R6a98286657bf4b86"/>
-    <p:sldId id="261" r:id="Rf1c5d2522d8f4973"/>
+    <p:sldId id="256" r:id="R07f7eb3b46644888"/>
+    <p:sldId id="257" r:id="Rf67afbb385254cd9"/>
+    <p:sldId id="258" r:id="R8b7616ce68c045f5"/>
+    <p:sldId id="259" r:id="R17a2a5809f7a498f"/>
+    <p:sldId id="260" r:id="R1b701aecaa1f4415"/>
+    <p:sldId id="261" r:id="R1d80b20b631f45b2"/>
   </p:sldIdLst>
   <p:sldSz cx="12192000" cy="6858000"/>
   <p:notesSz cx="6858000" cy="9144000"/>
@@ -1315,7 +1315,7 @@
                 <a:latin typeface="Calibri"/>
                 <a:ea typeface="Calibri"/>
               </a:rPr>
-              <a:t>Ask: +1 senior DV  ·  If no: USB3 + sample surge slip  ·  Decide by 2026-05-20</a:t>
+              <a:t>Ask: +1 senior DV  ·  If no: USB3 + sample surge slip  ·  Decide by 2026-05-20 (post-silicon)</a:t>
             </a:r>
           </a:p>
         </p:txBody>
@@ -2431,7 +2431,7 @@
                 <a:latin typeface="Calibri"/>
                 <a:ea typeface="Calibri"/>
               </a:rPr>
-              <a:t>Open req by: 2026-05-22.</a:t>
+              <a:t>Open req by: 2026-05-22 (same week as sample-plan steering).</a:t>
             </a:r>
           </a:p>
           <a:p xmlns:a="http://schemas.openxmlformats.org/drawingml/2006/main">

--- a/skills/presentations/assets/pptx/examples/06-resource-request.pptx
+++ b/skills/presentations/assets/pptx/examples/06-resource-request.pptx
@@ -5,15 +5,16 @@
     <p:sldMasterId xmlns:r="http://schemas.openxmlformats.org/officeDocument/2006/relationships" id="2147483648" r:id="rId1"/>
   </p:sldMasterIdLst>
   <p:notesMasterIdLst>
-    <p:notesMasterId r:id="R7685342403384de0"/>
+    <p:notesMasterId r:id="R25daae54b154411a"/>
   </p:notesMasterIdLst>
   <p:sldIdLst>
-    <p:sldId id="256" r:id="R07f7eb3b46644888"/>
-    <p:sldId id="257" r:id="Rf67afbb385254cd9"/>
-    <p:sldId id="258" r:id="R8b7616ce68c045f5"/>
-    <p:sldId id="259" r:id="R17a2a5809f7a498f"/>
-    <p:sldId id="260" r:id="R1b701aecaa1f4415"/>
-    <p:sldId id="261" r:id="R1d80b20b631f45b2"/>
+    <p:sldId id="256" r:id="R96f67d1c60894509"/>
+    <p:sldId id="257" r:id="Rcdcdde0f813f4973"/>
+    <p:sldId id="258" r:id="Rac77804c8354485a"/>
+    <p:sldId id="259" r:id="Rd165117a988c413d"/>
+    <p:sldId id="260" r:id="R91264056dacc4bfd"/>
+    <p:sldId id="261" r:id="R192f5ed37dcb4ecc"/>
+    <p:sldId id="262" r:id="R24b377343ea74b74"/>
   </p:sldIdLst>
   <p:sldSz cx="12192000" cy="6858000"/>
   <p:notesSz cx="6858000" cy="9144000"/>
@@ -479,6 +480,30 @@
               <a:t>Cover (example). Single-thread IO DV → +1 senior req with explicit sample slips if no.</a:t>
             </a:r>
           </a:p>
+          <a:p xmlns:a="http://schemas.openxmlformats.org/drawingml/2006/main">
+            <a:r>
+              <a:rPr lang="en-US"/>
+              <a:t/>
+            </a:r>
+          </a:p>
+          <a:p xmlns:a="http://schemas.openxmlformats.org/drawingml/2006/main">
+            <a:r>
+              <a:rPr lang="en-US"/>
+              <a:t>Roadmap-backed headcount / resource business case</a:t>
+            </a:r>
+          </a:p>
+          <a:p xmlns:a="http://schemas.openxmlformats.org/drawingml/2006/main">
+            <a:r>
+              <a:rPr lang="en-US"/>
+              <a:t>EM Tools — Headcount planning: https://www.em-tools.io/engineering-manager-responsibilities/headcount-planning</a:t>
+            </a:r>
+          </a:p>
+          <a:p xmlns:a="http://schemas.openxmlformats.org/drawingml/2006/main">
+            <a:r>
+              <a:rPr lang="en-US"/>
+              <a:t>TPM influence without authority (when no budget ownership): https://www.mariogerard.com/how-to-influence-without-authority-as-a-tpm/</a:t>
+            </a:r>
+          </a:p>
         </p:txBody>
       </p:sp>
     </p:spTree>
@@ -531,7 +556,19 @@
           <a:p xmlns:a="http://schemas.openxmlformats.org/drawingml/2006/main">
             <a:r>
               <a:rPr lang="en-US"/>
-              <a:t>One role, crisp if-no.</a:t>
+              <a:t>Roadmap-backed headcount / resource business case</a:t>
+            </a:r>
+          </a:p>
+          <a:p xmlns:a="http://schemas.openxmlformats.org/drawingml/2006/main">
+            <a:r>
+              <a:rPr lang="en-US"/>
+              <a:t>EM Tools — Headcount planning: https://www.em-tools.io/engineering-manager-responsibilities/headcount-planning</a:t>
+            </a:r>
+          </a:p>
+          <a:p xmlns:a="http://schemas.openxmlformats.org/drawingml/2006/main">
+            <a:r>
+              <a:rPr lang="en-US"/>
+              <a:t>TPM influence without authority (when no budget ownership): https://www.mariogerard.com/how-to-influence-without-authority-as-a-tpm/</a:t>
             </a:r>
           </a:p>
         </p:txBody>
@@ -586,7 +623,7 @@
           <a:p xmlns:a="http://schemas.openxmlformats.org/drawingml/2006/main">
             <a:r>
               <a:rPr lang="en-US"/>
-              <a:t>Roadmap-backed.</a:t>
+              <a:t>One role, crisp if-no.</a:t>
             </a:r>
           </a:p>
         </p:txBody>
@@ -641,7 +678,7 @@
           <a:p xmlns:a="http://schemas.openxmlformats.org/drawingml/2006/main">
             <a:r>
               <a:rPr lang="en-US"/>
-              <a:t>Explicit if-no.</a:t>
+              <a:t>Roadmap-backed.</a:t>
             </a:r>
           </a:p>
         </p:txBody>
@@ -696,7 +733,7 @@
           <a:p xmlns:a="http://schemas.openxmlformats.org/drawingml/2006/main">
             <a:r>
               <a:rPr lang="en-US"/>
-              <a:t>Walk trade-offs; land recommendation.</a:t>
+              <a:t>Explicit if-no.</a:t>
             </a:r>
           </a:p>
         </p:txBody>
@@ -710,6 +747,61 @@
 </file>
 
 <file path=ppt/notesSlides/notesSlide6.xml><?xml version="1.0" encoding="utf-8"?>
+<p:notes xmlns:p="http://schemas.openxmlformats.org/presentationml/2006/main">
+  <p:cSld>
+    <p:spTree>
+      <p:nvGrpSpPr>
+        <p:cNvPr id="1" name=""/>
+        <p:cNvGrpSpPr/>
+        <p:nvPr/>
+      </p:nvGrpSpPr>
+      <p:grpSpPr>
+        <a:xfrm xmlns:a="http://schemas.openxmlformats.org/drawingml/2006/main"/>
+      </p:grpSpPr>
+      <p:sp>
+        <p:nvSpPr>
+          <p:cNvPr id="2" name="Slide Image Placeholder 1"/>
+          <p:cNvSpPr/>
+          <p:nvPr>
+            <p:ph type="sldImg" idx="0"/>
+          </p:nvPr>
+        </p:nvSpPr>
+        <p:spPr/>
+        <p:txBody>
+          <a:bodyPr xmlns:a="http://schemas.openxmlformats.org/drawingml/2006/main"/>
+          <a:lstStyle xmlns:a="http://schemas.openxmlformats.org/drawingml/2006/main"/>
+          <a:p xmlns:a="http://schemas.openxmlformats.org/drawingml/2006/main"/>
+        </p:txBody>
+      </p:sp>
+      <p:sp>
+        <p:nvSpPr>
+          <p:cNvPr id="3" name="Notes Placeholder 2"/>
+          <p:cNvSpPr/>
+          <p:nvPr>
+            <p:ph type="body" idx="1"/>
+          </p:nvPr>
+        </p:nvSpPr>
+        <p:spPr/>
+        <p:txBody>
+          <a:bodyPr xmlns:a="http://schemas.openxmlformats.org/drawingml/2006/main"/>
+          <a:lstStyle xmlns:a="http://schemas.openxmlformats.org/drawingml/2006/main"/>
+          <a:p xmlns:a="http://schemas.openxmlformats.org/drawingml/2006/main">
+            <a:r>
+              <a:rPr lang="en-US"/>
+              <a:t>Walk trade-offs; land recommendation.</a:t>
+            </a:r>
+          </a:p>
+        </p:txBody>
+      </p:sp>
+    </p:spTree>
+  </p:cSld>
+  <p:clrMapOvr>
+    <a:masterClrMapping xmlns:a="http://schemas.openxmlformats.org/drawingml/2006/main"/>
+  </p:clrMapOvr>
+</p:notes>
+</file>
+
+<file path=ppt/notesSlides/notesSlide7.xml><?xml version="1.0" encoding="utf-8"?>
 <p:notes xmlns:p="http://schemas.openxmlformats.org/presentationml/2006/main">
   <p:cSld>
     <p:spTree>
@@ -1079,8 +1171,8 @@
         </p:nvSpPr>
         <p:spPr>
           <a:xfrm xmlns:a="http://schemas.openxmlformats.org/drawingml/2006/main">
-            <a:off x="504000" y="1008000"/>
-            <a:ext cx="11088000" cy="324000"/>
+            <a:off x="504000" y="936000"/>
+            <a:ext cx="11088000" cy="306000"/>
           </a:xfrm>
           <a:prstGeom xmlns:a="http://schemas.openxmlformats.org/drawingml/2006/main" prst="rect">
             <a:avLst/>
@@ -1111,8 +1203,8 @@
         </p:nvSpPr>
         <p:spPr>
           <a:xfrm xmlns:a="http://schemas.openxmlformats.org/drawingml/2006/main">
-            <a:off x="504000" y="1440000"/>
-            <a:ext cx="11088000" cy="936000"/>
+            <a:off x="504000" y="1332000"/>
+            <a:ext cx="11088000" cy="900000"/>
           </a:xfrm>
           <a:prstGeom xmlns:a="http://schemas.openxmlformats.org/drawingml/2006/main" prst="rect">
             <a:avLst/>
@@ -1123,7 +1215,7 @@
           <a:lstStyle xmlns:a="http://schemas.openxmlformats.org/drawingml/2006/main"/>
           <a:p xmlns:a="http://schemas.openxmlformats.org/drawingml/2006/main">
             <a:r>
-              <a:rPr lang="en-US" sz="3400" b="1">
+              <a:rPr lang="en-US" sz="3200" b="1">
                 <a:solidFill>
                   <a:srgbClr val="FFFFFF"/>
                 </a:solidFill>
@@ -1143,8 +1235,8 @@
         </p:nvSpPr>
         <p:spPr>
           <a:xfrm xmlns:a="http://schemas.openxmlformats.org/drawingml/2006/main">
-            <a:off x="504000" y="2520000"/>
-            <a:ext cx="11088000" cy="720000"/>
+            <a:off x="504000" y="2340000"/>
+            <a:ext cx="11088000" cy="648000"/>
           </a:xfrm>
           <a:prstGeom xmlns:a="http://schemas.openxmlformats.org/drawingml/2006/main" prst="rect">
             <a:avLst/>
@@ -1155,7 +1247,7 @@
           <a:lstStyle xmlns:a="http://schemas.openxmlformats.org/drawingml/2006/main"/>
           <a:p xmlns:a="http://schemas.openxmlformats.org/drawingml/2006/main">
             <a:r>
-              <a:rPr lang="en-US" sz="1700" b="0">
+              <a:rPr lang="en-US" sz="1600" b="0">
                 <a:solidFill>
                   <a:srgbClr val="CADCFC"/>
                 </a:solidFill>
@@ -1170,6 +1262,38 @@
       <p:sp>
         <p:nvSpPr>
           <p:cNvPr id="100003" name="TextBox 4"/>
+          <p:cNvSpPr txBox="1"/>
+          <p:nvPr/>
+        </p:nvSpPr>
+        <p:spPr>
+          <a:xfrm xmlns:a="http://schemas.openxmlformats.org/drawingml/2006/main">
+            <a:off x="504000" y="3240000"/>
+            <a:ext cx="11088000" cy="576000"/>
+          </a:xfrm>
+          <a:prstGeom xmlns:a="http://schemas.openxmlformats.org/drawingml/2006/main" prst="rect">
+            <a:avLst/>
+          </a:prstGeom>
+        </p:spPr>
+        <p:txBody>
+          <a:bodyPr xmlns:a="http://schemas.openxmlformats.org/drawingml/2006/main"/>
+          <a:lstStyle xmlns:a="http://schemas.openxmlformats.org/drawingml/2006/main"/>
+          <a:p xmlns:a="http://schemas.openxmlformats.org/drawingml/2006/main">
+            <a:r>
+              <a:rPr lang="en-US" sz="1400" b="0">
+                <a:solidFill>
+                  <a:srgbClr val="A0C4E8"/>
+                </a:solidFill>
+                <a:latin typeface="Calibri"/>
+                <a:ea typeface="Calibri"/>
+              </a:rPr>
+              <a:t>Pattern: Roadmap-backed headcount / resource business case</a:t>
+            </a:r>
+          </a:p>
+        </p:txBody>
+      </p:sp>
+      <p:sp>
+        <p:nvSpPr>
+          <p:cNvPr id="100004" name="TextBox 5"/>
           <p:cNvSpPr txBox="1"/>
           <p:nvPr/>
         </p:nvSpPr>
@@ -1205,6 +1329,279 @@
 </file>
 
 <file path=ppt/slides/slide2.xml><?xml version="1.0" encoding="utf-8"?>
+<p:sld xmlns:p="http://schemas.openxmlformats.org/presentationml/2006/main">
+  <p:cSld name="Pattern provenance">
+    <p:bg>
+      <p:bgPr>
+        <a:solidFill xmlns:a="http://schemas.openxmlformats.org/drawingml/2006/main">
+          <a:srgbClr val="F4F7FC"/>
+        </a:solidFill>
+      </p:bgPr>
+    </p:bg>
+    <p:spTree>
+      <p:nvGrpSpPr>
+        <p:cNvPr id="1" name=""/>
+        <p:cNvGrpSpPr/>
+        <p:nvPr/>
+      </p:nvGrpSpPr>
+      <p:grpSpPr/>
+      <p:sp>
+        <p:nvSpPr>
+          <p:cNvPr id="100005" name="TextBox 1"/>
+          <p:cNvSpPr txBox="1"/>
+          <p:nvPr/>
+        </p:nvSpPr>
+        <p:spPr>
+          <a:xfrm xmlns:a="http://schemas.openxmlformats.org/drawingml/2006/main">
+            <a:off x="504000" y="270000"/>
+            <a:ext cx="11088000" cy="270000"/>
+          </a:xfrm>
+          <a:prstGeom xmlns:a="http://schemas.openxmlformats.org/drawingml/2006/main" prst="rect">
+            <a:avLst/>
+          </a:prstGeom>
+        </p:spPr>
+        <p:txBody>
+          <a:bodyPr xmlns:a="http://schemas.openxmlformats.org/drawingml/2006/main"/>
+          <a:lstStyle xmlns:a="http://schemas.openxmlformats.org/drawingml/2006/main"/>
+          <a:p xmlns:a="http://schemas.openxmlformats.org/drawingml/2006/main">
+            <a:r>
+              <a:rPr lang="en-US" sz="1100" b="1">
+                <a:solidFill>
+                  <a:srgbClr val="2B6CB0"/>
+                </a:solidFill>
+                <a:latin typeface="Calibri"/>
+                <a:ea typeface="Calibri"/>
+              </a:rPr>
+              <a:t>WHERE THIS DECK SHAPE COMES FROM</a:t>
+            </a:r>
+          </a:p>
+        </p:txBody>
+      </p:sp>
+      <p:sp>
+        <p:nvSpPr>
+          <p:cNvPr id="100006" name="TextBox 2"/>
+          <p:cNvSpPr txBox="1"/>
+          <p:nvPr/>
+        </p:nvSpPr>
+        <p:spPr>
+          <a:xfrm xmlns:a="http://schemas.openxmlformats.org/drawingml/2006/main">
+            <a:off x="504000" y="558000"/>
+            <a:ext cx="11088000" cy="612000"/>
+          </a:xfrm>
+          <a:prstGeom xmlns:a="http://schemas.openxmlformats.org/drawingml/2006/main" prst="rect">
+            <a:avLst/>
+          </a:prstGeom>
+        </p:spPr>
+        <p:txBody>
+          <a:bodyPr xmlns:a="http://schemas.openxmlformats.org/drawingml/2006/main"/>
+          <a:lstStyle xmlns:a="http://schemas.openxmlformats.org/drawingml/2006/main"/>
+          <a:p xmlns:a="http://schemas.openxmlformats.org/drawingml/2006/main">
+            <a:r>
+              <a:rPr lang="en-US" sz="2800" b="1">
+                <a:solidFill>
+                  <a:srgbClr val="1A202C"/>
+                </a:solidFill>
+                <a:latin typeface="Calibri"/>
+                <a:ea typeface="Calibri"/>
+              </a:rPr>
+              <a:t>Pattern provenance</a:t>
+            </a:r>
+          </a:p>
+        </p:txBody>
+      </p:sp>
+      <p:sp>
+        <p:nvSpPr>
+          <p:cNvPr id="100007" name="TextBox 3"/>
+          <p:cNvSpPr txBox="1"/>
+          <p:nvPr/>
+        </p:nvSpPr>
+        <p:spPr>
+          <a:xfrm xmlns:a="http://schemas.openxmlformats.org/drawingml/2006/main">
+            <a:off x="504000" y="1260000"/>
+            <a:ext cx="11088000" cy="4860000"/>
+          </a:xfrm>
+          <a:prstGeom xmlns:a="http://schemas.openxmlformats.org/drawingml/2006/main" prst="rect">
+            <a:avLst/>
+          </a:prstGeom>
+          <a:solidFill xmlns:a="http://schemas.openxmlformats.org/drawingml/2006/main">
+            <a:srgbClr val="FFFFFF"/>
+          </a:solidFill>
+        </p:spPr>
+        <p:txBody>
+          <a:bodyPr xmlns:a="http://schemas.openxmlformats.org/drawingml/2006/main"/>
+          <a:lstStyle xmlns:a="http://schemas.openxmlformats.org/drawingml/2006/main"/>
+          <a:p xmlns:a="http://schemas.openxmlformats.org/drawingml/2006/main">
+            <a:r>
+              <a:rPr lang="en-US" sz="1500" b="0">
+                <a:solidFill>
+                  <a:srgbClr val="1A202C"/>
+                </a:solidFill>
+                <a:latin typeface="Calibri"/>
+                <a:ea typeface="Calibri"/>
+              </a:rPr>
+              <a:t>Public pattern (structure only — not a confidential company deck):</a:t>
+            </a:r>
+          </a:p>
+          <a:p xmlns:a="http://schemas.openxmlformats.org/drawingml/2006/main">
+            <a:r>
+              <a:rPr lang="en-US" sz="1500" b="0">
+                <a:solidFill>
+                  <a:srgbClr val="1A202C"/>
+                </a:solidFill>
+                <a:latin typeface="Calibri"/>
+                <a:ea typeface="Calibri"/>
+              </a:rPr>
+              <a:t/>
+            </a:r>
+          </a:p>
+          <a:p xmlns:a="http://schemas.openxmlformats.org/drawingml/2006/main">
+            <a:r>
+              <a:rPr lang="en-US" sz="1500" b="0">
+                <a:solidFill>
+                  <a:srgbClr val="1A202C"/>
+                </a:solidFill>
+                <a:latin typeface="Calibri"/>
+                <a:ea typeface="Calibri"/>
+              </a:rPr>
+              <a:t>Roadmap-backed headcount / resource business case</a:t>
+            </a:r>
+          </a:p>
+          <a:p xmlns:a="http://schemas.openxmlformats.org/drawingml/2006/main">
+            <a:r>
+              <a:rPr lang="en-US" sz="1500" b="0">
+                <a:solidFill>
+                  <a:srgbClr val="1A202C"/>
+                </a:solidFill>
+                <a:latin typeface="Calibri"/>
+                <a:ea typeface="Calibri"/>
+              </a:rPr>
+              <a:t/>
+            </a:r>
+          </a:p>
+          <a:p xmlns:a="http://schemas.openxmlformats.org/drawingml/2006/main">
+            <a:r>
+              <a:rPr lang="en-US" sz="1500" b="0">
+                <a:solidFill>
+                  <a:srgbClr val="1A202C"/>
+                </a:solidFill>
+                <a:latin typeface="Calibri"/>
+                <a:ea typeface="Calibri"/>
+              </a:rPr>
+              <a:t>• EM Tools — Headcount planning</a:t>
+            </a:r>
+          </a:p>
+          <a:p xmlns:a="http://schemas.openxmlformats.org/drawingml/2006/main">
+            <a:r>
+              <a:rPr lang="en-US" sz="1500" b="0">
+                <a:solidFill>
+                  <a:srgbClr val="1A202C"/>
+                </a:solidFill>
+                <a:latin typeface="Calibri"/>
+                <a:ea typeface="Calibri"/>
+              </a:rPr>
+              <a:t>  https://www.em-tools.io/engineering-manager-responsibilities/headcount-planning</a:t>
+            </a:r>
+          </a:p>
+          <a:p xmlns:a="http://schemas.openxmlformats.org/drawingml/2006/main">
+            <a:r>
+              <a:rPr lang="en-US" sz="1500" b="0">
+                <a:solidFill>
+                  <a:srgbClr val="1A202C"/>
+                </a:solidFill>
+                <a:latin typeface="Calibri"/>
+                <a:ea typeface="Calibri"/>
+              </a:rPr>
+              <a:t>• TPM influence without authority (when no budget ownership)</a:t>
+            </a:r>
+          </a:p>
+          <a:p xmlns:a="http://schemas.openxmlformats.org/drawingml/2006/main">
+            <a:r>
+              <a:rPr lang="en-US" sz="1500" b="0">
+                <a:solidFill>
+                  <a:srgbClr val="1A202C"/>
+                </a:solidFill>
+                <a:latin typeface="Calibri"/>
+                <a:ea typeface="Calibri"/>
+              </a:rPr>
+              <a:t>  https://www.mariogerard.com/how-to-influence-without-authority-as-a-tpm/</a:t>
+            </a:r>
+          </a:p>
+          <a:p xmlns:a="http://schemas.openxmlformats.org/drawingml/2006/main">
+            <a:r>
+              <a:rPr lang="en-US" sz="1500" b="0">
+                <a:solidFill>
+                  <a:srgbClr val="1A202C"/>
+                </a:solidFill>
+                <a:latin typeface="Calibri"/>
+                <a:ea typeface="Calibri"/>
+              </a:rPr>
+              <a:t/>
+            </a:r>
+          </a:p>
+          <a:p xmlns:a="http://schemas.openxmlformats.org/drawingml/2006/main">
+            <a:r>
+              <a:rPr lang="en-US" sz="1500" b="0">
+                <a:solidFill>
+                  <a:srgbClr val="1A202C"/>
+                </a:solidFill>
+                <a:latin typeface="Calibri"/>
+                <a:ea typeface="Calibri"/>
+              </a:rPr>
+              <a:t>How to use: copy section order and decision verbs; replace with your metrics.</a:t>
+            </a:r>
+          </a:p>
+          <a:p xmlns:a="http://schemas.openxmlformats.org/drawingml/2006/main">
+            <a:r>
+              <a:rPr lang="en-US" sz="1500" b="0">
+                <a:solidFill>
+                  <a:srgbClr val="1A202C"/>
+                </a:solidFill>
+                <a:latin typeface="Calibri"/>
+                <a:ea typeface="Calibri"/>
+              </a:rPr>
+              <a:t>In-repo: skills/presentations/classic-public-cases.md</a:t>
+            </a:r>
+          </a:p>
+        </p:txBody>
+      </p:sp>
+      <p:sp>
+        <p:nvSpPr>
+          <p:cNvPr id="100008" name="TextBox 4"/>
+          <p:cNvSpPr txBox="1"/>
+          <p:nvPr/>
+        </p:nvSpPr>
+        <p:spPr>
+          <a:xfrm xmlns:a="http://schemas.openxmlformats.org/drawingml/2006/main">
+            <a:off x="504000" y="6426000"/>
+            <a:ext cx="11088000" cy="306000"/>
+          </a:xfrm>
+          <a:prstGeom xmlns:a="http://schemas.openxmlformats.org/drawingml/2006/main" prst="rect">
+            <a:avLst/>
+          </a:prstGeom>
+        </p:spPr>
+        <p:txBody>
+          <a:bodyPr xmlns:a="http://schemas.openxmlformats.org/drawingml/2006/main"/>
+          <a:lstStyle xmlns:a="http://schemas.openxmlformats.org/drawingml/2006/main"/>
+          <a:p xmlns:a="http://schemas.openxmlformats.org/drawingml/2006/main">
+            <a:r>
+              <a:rPr lang="en-US" sz="1100" b="0">
+                <a:solidFill>
+                  <a:srgbClr val="718096"/>
+                </a:solidFill>
+                <a:latin typeface="Calibri"/>
+                <a:ea typeface="Calibri"/>
+              </a:rPr>
+              <a:t>Atlas Platform  ·  Project Aurora  ·  NovaSemi  ·  2026</a:t>
+            </a:r>
+          </a:p>
+        </p:txBody>
+      </p:sp>
+    </p:spTree>
+  </p:cSld>
+</p:sld>
+</file>
+
+<file path=ppt/slides/slide3.xml><?xml version="1.0" encoding="utf-8"?>
 <p:sld xmlns:p="http://schemas.openxmlformats.org/presentationml/2006/main">
   <p:cSld name="BLUF — approve 1 senior DV req">
     <p:bg>
@@ -1223,7 +1620,7 @@
       <p:grpSpPr/>
       <p:sp>
         <p:nvSpPr>
-          <p:cNvPr id="100004" name="TextBox 1"/>
+          <p:cNvPr id="100009" name="TextBox 1"/>
           <p:cNvSpPr txBox="1"/>
           <p:nvPr/>
         </p:nvSpPr>
@@ -1255,7 +1652,7 @@
       </p:sp>
       <p:sp>
         <p:nvSpPr>
-          <p:cNvPr id="100005" name="TextBox 2"/>
+          <p:cNvPr id="100010" name="TextBox 2"/>
           <p:cNvSpPr txBox="1"/>
           <p:nvPr/>
         </p:nvSpPr>
@@ -1287,7 +1684,7 @@
       </p:sp>
       <p:sp>
         <p:nvSpPr>
-          <p:cNvPr id="100006" name="TextBox 3"/>
+          <p:cNvPr id="100011" name="TextBox 3"/>
           <p:cNvSpPr txBox="1"/>
           <p:nvPr/>
         </p:nvSpPr>
@@ -1322,7 +1719,7 @@
       </p:sp>
       <p:sp>
         <p:nvSpPr>
-          <p:cNvPr id="100007" name="TextBox 4"/>
+          <p:cNvPr id="100012" name="TextBox 4"/>
           <p:cNvSpPr txBox="1"/>
           <p:nvPr/>
         </p:nvSpPr>
@@ -1405,7 +1802,7 @@
       </p:sp>
       <p:sp>
         <p:nvSpPr>
-          <p:cNvPr id="100008" name="TextBox 5"/>
+          <p:cNvPr id="100013" name="TextBox 5"/>
           <p:cNvSpPr txBox="1"/>
           <p:nvPr/>
         </p:nvSpPr>
@@ -1440,7 +1837,7 @@
 </p:sld>
 </file>
 
-<file path=ppt/slides/slide3.xml><?xml version="1.0" encoding="utf-8"?>
+<file path=ppt/slides/slide4.xml><?xml version="1.0" encoding="utf-8"?>
 <p:sld xmlns:p="http://schemas.openxmlformats.org/presentationml/2006/main">
   <p:cSld name="Linked roadmap outcomes">
     <p:bg>
@@ -1459,7 +1856,7 @@
       <p:grpSpPr/>
       <p:sp>
         <p:nvSpPr>
-          <p:cNvPr id="100009" name="TextBox 1"/>
+          <p:cNvPr id="100014" name="TextBox 1"/>
           <p:cNvSpPr txBox="1"/>
           <p:nvPr/>
         </p:nvSpPr>
@@ -1491,7 +1888,7 @@
       </p:sp>
       <p:sp>
         <p:nvSpPr>
-          <p:cNvPr id="100010" name="TextBox 2"/>
+          <p:cNvPr id="100015" name="TextBox 2"/>
           <p:cNvSpPr txBox="1"/>
           <p:nvPr/>
         </p:nvSpPr>
@@ -1586,7 +1983,7 @@
       </p:sp>
       <p:sp>
         <p:nvSpPr>
-          <p:cNvPr id="100011" name="TextBox 3"/>
+          <p:cNvPr id="100016" name="TextBox 3"/>
           <p:cNvSpPr txBox="1"/>
           <p:nvPr/>
         </p:nvSpPr>
@@ -1621,7 +2018,7 @@
 </p:sld>
 </file>
 
-<file path=ppt/slides/slide4.xml><?xml version="1.0" encoding="utf-8"?>
+<file path=ppt/slides/slide5.xml><?xml version="1.0" encoding="utf-8"?>
 <p:sld xmlns:p="http://schemas.openxmlformats.org/presentationml/2006/main">
   <p:cSld name="If declined (explicit)">
     <p:bg>
@@ -1640,7 +2037,7 @@
       <p:grpSpPr/>
       <p:sp>
         <p:nvSpPr>
-          <p:cNvPr id="100012" name="TextBox 1"/>
+          <p:cNvPr id="100017" name="TextBox 1"/>
           <p:cNvSpPr txBox="1"/>
           <p:nvPr/>
         </p:nvSpPr>
@@ -1672,7 +2069,7 @@
       </p:sp>
       <p:sp>
         <p:nvSpPr>
-          <p:cNvPr id="100013" name="TextBox 2"/>
+          <p:cNvPr id="100018" name="TextBox 2"/>
           <p:cNvSpPr txBox="1"/>
           <p:nvPr/>
         </p:nvSpPr>
@@ -1755,7 +2152,7 @@
       </p:sp>
       <p:sp>
         <p:nvSpPr>
-          <p:cNvPr id="100014" name="TextBox 3"/>
+          <p:cNvPr id="100019" name="TextBox 3"/>
           <p:cNvSpPr txBox="1"/>
           <p:nvPr/>
         </p:nvSpPr>
@@ -1790,7 +2187,7 @@
 </p:sld>
 </file>
 
-<file path=ppt/slides/slide5.xml><?xml version="1.0" encoding="utf-8"?>
+<file path=ppt/slides/slide6.xml><?xml version="1.0" encoding="utf-8"?>
 <p:sld xmlns:p="http://schemas.openxmlformats.org/presentationml/2006/main">
   <p:cSld name="Options &amp; recommendation">
     <p:bg>
@@ -1809,7 +2206,7 @@
       <p:grpSpPr/>
       <p:sp>
         <p:nvSpPr>
-          <p:cNvPr id="100015" name="TextBox 1"/>
+          <p:cNvPr id="100020" name="TextBox 1"/>
           <p:cNvSpPr txBox="1"/>
           <p:nvPr/>
         </p:nvSpPr>
@@ -1841,7 +2238,7 @@
       </p:sp>
       <p:sp>
         <p:nvSpPr>
-          <p:cNvPr id="100016" name="TextBox 2"/>
+          <p:cNvPr id="100021" name="TextBox 2"/>
           <p:cNvSpPr txBox="1"/>
           <p:nvPr/>
         </p:nvSpPr>
@@ -1873,7 +2270,7 @@
       </p:sp>
       <p:graphicFrame>
         <p:nvGraphicFramePr>
-          <p:cNvPr id="100017" name="Table 1"/>
+          <p:cNvPr id="100022" name="Table 1"/>
           <p:cNvGraphicFramePr/>
           <p:nvPr/>
         </p:nvGraphicFramePr>
@@ -2273,7 +2670,7 @@
       </p:graphicFrame>
       <p:sp>
         <p:nvSpPr>
-          <p:cNvPr id="100018" name="TextBox 3"/>
+          <p:cNvPr id="100023" name="TextBox 3"/>
           <p:cNvSpPr txBox="1"/>
           <p:nvPr/>
         </p:nvSpPr>
@@ -2308,7 +2705,7 @@
 </p:sld>
 </file>
 
-<file path=ppt/slides/slide6.xml><?xml version="1.0" encoding="utf-8"?>
+<file path=ppt/slides/slide7.xml><?xml version="1.0" encoding="utf-8"?>
 <p:sld xmlns:p="http://schemas.openxmlformats.org/presentationml/2006/main">
   <p:cSld name="Decision &amp; ask">
     <p:bg>
@@ -2327,7 +2724,7 @@
       <p:grpSpPr/>
       <p:sp>
         <p:nvSpPr>
-          <p:cNvPr id="100019" name="TextBox 1"/>
+          <p:cNvPr id="100024" name="TextBox 1"/>
           <p:cNvSpPr txBox="1"/>
           <p:nvPr/>
         </p:nvSpPr>
@@ -2359,7 +2756,7 @@
       </p:sp>
       <p:sp>
         <p:nvSpPr>
-          <p:cNvPr id="100020" name="TextBox 2"/>
+          <p:cNvPr id="100025" name="TextBox 2"/>
           <p:cNvSpPr txBox="1"/>
           <p:nvPr/>
         </p:nvSpPr>
@@ -2391,7 +2788,7 @@
       </p:sp>
       <p:sp>
         <p:nvSpPr>
-          <p:cNvPr id="100021" name="TextBox 3"/>
+          <p:cNvPr id="100026" name="TextBox 3"/>
           <p:cNvSpPr txBox="1"/>
           <p:nvPr/>
         </p:nvSpPr>
@@ -2450,7 +2847,7 @@
       </p:sp>
       <p:sp>
         <p:nvSpPr>
-          <p:cNvPr id="100022" name="TextBox 4"/>
+          <p:cNvPr id="100027" name="TextBox 4"/>
           <p:cNvSpPr txBox="1"/>
           <p:nvPr/>
         </p:nvSpPr>

--- a/skills/presentations/assets/pptx/examples/06-resource-request.pptx
+++ b/skills/presentations/assets/pptx/examples/06-resource-request.pptx
@@ -5,16 +5,17 @@
     <p:sldMasterId xmlns:r="http://schemas.openxmlformats.org/officeDocument/2006/relationships" id="2147483648" r:id="rId1"/>
   </p:sldMasterIdLst>
   <p:notesMasterIdLst>
-    <p:notesMasterId r:id="R25daae54b154411a"/>
+    <p:notesMasterId r:id="Rb6ae0f50b7374cb0"/>
   </p:notesMasterIdLst>
   <p:sldIdLst>
-    <p:sldId id="256" r:id="R96f67d1c60894509"/>
-    <p:sldId id="257" r:id="Rcdcdde0f813f4973"/>
-    <p:sldId id="258" r:id="Rac77804c8354485a"/>
-    <p:sldId id="259" r:id="Rd165117a988c413d"/>
-    <p:sldId id="260" r:id="R91264056dacc4bfd"/>
-    <p:sldId id="261" r:id="R192f5ed37dcb4ecc"/>
-    <p:sldId id="262" r:id="R24b377343ea74b74"/>
+    <p:sldId id="256" r:id="R76e8d9a4eab645ca"/>
+    <p:sldId id="257" r:id="Ra8abd65b485c4520"/>
+    <p:sldId id="258" r:id="R7dcf83517cd64f36"/>
+    <p:sldId id="259" r:id="Rff033af9f76847a9"/>
+    <p:sldId id="260" r:id="R9052f0aa29384dc7"/>
+    <p:sldId id="261" r:id="R07a30c5391e84880"/>
+    <p:sldId id="262" r:id="R150152652ee14f48"/>
+    <p:sldId id="263" r:id="Rf3de39681c7e4a40"/>
   </p:sldIdLst>
   <p:sldSz cx="12192000" cy="6858000"/>
   <p:notesSz cx="6858000" cy="9144000"/>
@@ -623,7 +624,7 @@
           <a:p xmlns:a="http://schemas.openxmlformats.org/drawingml/2006/main">
             <a:r>
               <a:rPr lang="en-US"/>
-              <a:t>One role, crisp if-no.</a:t>
+              <a:t>Agent/human: answer who/stakes/decision from this slide alone. Recommend=Full +1 senior DV; open req by 2026-05-22. by 2026-05-20 (post-silicon week).</a:t>
             </a:r>
           </a:p>
         </p:txBody>
@@ -678,7 +679,7 @@
           <a:p xmlns:a="http://schemas.openxmlformats.org/drawingml/2006/main">
             <a:r>
               <a:rPr lang="en-US"/>
-              <a:t>Roadmap-backed.</a:t>
+              <a:t>One role, crisp if-no.</a:t>
             </a:r>
           </a:p>
         </p:txBody>
@@ -733,7 +734,7 @@
           <a:p xmlns:a="http://schemas.openxmlformats.org/drawingml/2006/main">
             <a:r>
               <a:rPr lang="en-US"/>
-              <a:t>Explicit if-no.</a:t>
+              <a:t>Roadmap-backed.</a:t>
             </a:r>
           </a:p>
         </p:txBody>
@@ -788,7 +789,7 @@
           <a:p xmlns:a="http://schemas.openxmlformats.org/drawingml/2006/main">
             <a:r>
               <a:rPr lang="en-US"/>
-              <a:t>Walk trade-offs; land recommendation.</a:t>
+              <a:t>Explicit if-no.</a:t>
             </a:r>
           </a:p>
         </p:txBody>
@@ -802,6 +803,61 @@
 </file>
 
 <file path=ppt/notesSlides/notesSlide7.xml><?xml version="1.0" encoding="utf-8"?>
+<p:notes xmlns:p="http://schemas.openxmlformats.org/presentationml/2006/main">
+  <p:cSld>
+    <p:spTree>
+      <p:nvGrpSpPr>
+        <p:cNvPr id="1" name=""/>
+        <p:cNvGrpSpPr/>
+        <p:nvPr/>
+      </p:nvGrpSpPr>
+      <p:grpSpPr>
+        <a:xfrm xmlns:a="http://schemas.openxmlformats.org/drawingml/2006/main"/>
+      </p:grpSpPr>
+      <p:sp>
+        <p:nvSpPr>
+          <p:cNvPr id="2" name="Slide Image Placeholder 1"/>
+          <p:cNvSpPr/>
+          <p:nvPr>
+            <p:ph type="sldImg" idx="0"/>
+          </p:nvPr>
+        </p:nvSpPr>
+        <p:spPr/>
+        <p:txBody>
+          <a:bodyPr xmlns:a="http://schemas.openxmlformats.org/drawingml/2006/main"/>
+          <a:lstStyle xmlns:a="http://schemas.openxmlformats.org/drawingml/2006/main"/>
+          <a:p xmlns:a="http://schemas.openxmlformats.org/drawingml/2006/main"/>
+        </p:txBody>
+      </p:sp>
+      <p:sp>
+        <p:nvSpPr>
+          <p:cNvPr id="3" name="Notes Placeholder 2"/>
+          <p:cNvSpPr/>
+          <p:nvPr>
+            <p:ph type="body" idx="1"/>
+          </p:nvPr>
+        </p:nvSpPr>
+        <p:spPr/>
+        <p:txBody>
+          <a:bodyPr xmlns:a="http://schemas.openxmlformats.org/drawingml/2006/main"/>
+          <a:lstStyle xmlns:a="http://schemas.openxmlformats.org/drawingml/2006/main"/>
+          <a:p xmlns:a="http://schemas.openxmlformats.org/drawingml/2006/main">
+            <a:r>
+              <a:rPr lang="en-US"/>
+              <a:t>Walk trade-offs; land recommendation.</a:t>
+            </a:r>
+          </a:p>
+        </p:txBody>
+      </p:sp>
+    </p:spTree>
+  </p:cSld>
+  <p:clrMapOvr>
+    <a:masterClrMapping xmlns:a="http://schemas.openxmlformats.org/drawingml/2006/main"/>
+  </p:clrMapOvr>
+</p:notes>
+</file>
+
+<file path=ppt/notesSlides/notesSlide8.xml><?xml version="1.0" encoding="utf-8"?>
 <p:notes xmlns:p="http://schemas.openxmlformats.org/presentationml/2006/main">
   <p:cSld>
     <p:spTree>
@@ -1603,6 +1659,387 @@
 
 <file path=ppt/slides/slide3.xml><?xml version="1.0" encoding="utf-8"?>
 <p:sld xmlns:p="http://schemas.openxmlformats.org/presentationml/2006/main">
+  <p:cSld name="Situation &amp; decision card">
+    <p:bg>
+      <p:bgPr>
+        <a:solidFill xmlns:a="http://schemas.openxmlformats.org/drawingml/2006/main">
+          <a:srgbClr val="F4F7FC"/>
+        </a:solidFill>
+      </p:bgPr>
+    </p:bg>
+    <p:spTree>
+      <p:nvGrpSpPr>
+        <p:cNvPr id="1" name=""/>
+        <p:cNvGrpSpPr/>
+        <p:nvPr/>
+      </p:nvGrpSpPr>
+      <p:grpSpPr/>
+      <p:sp>
+        <p:nvSpPr>
+          <p:cNvPr id="100009" name="TextBox 1"/>
+          <p:cNvSpPr txBox="1"/>
+          <p:nvPr/>
+        </p:nvSpPr>
+        <p:spPr>
+          <a:xfrm xmlns:a="http://schemas.openxmlformats.org/drawingml/2006/main">
+            <a:off x="504000" y="270000"/>
+            <a:ext cx="11088000" cy="270000"/>
+          </a:xfrm>
+          <a:prstGeom xmlns:a="http://schemas.openxmlformats.org/drawingml/2006/main" prst="rect">
+            <a:avLst/>
+          </a:prstGeom>
+        </p:spPr>
+        <p:txBody>
+          <a:bodyPr xmlns:a="http://schemas.openxmlformats.org/drawingml/2006/main"/>
+          <a:lstStyle xmlns:a="http://schemas.openxmlformats.org/drawingml/2006/main"/>
+          <a:p xmlns:a="http://schemas.openxmlformats.org/drawingml/2006/main">
+            <a:r>
+              <a:rPr lang="en-US" sz="1100" b="1">
+                <a:solidFill>
+                  <a:srgbClr val="2B6CB0"/>
+                </a:solidFill>
+                <a:latin typeface="Calibri"/>
+                <a:ea typeface="Calibri"/>
+              </a:rPr>
+              <a:t>READ THIS BEFORE THE DETAILS</a:t>
+            </a:r>
+          </a:p>
+        </p:txBody>
+      </p:sp>
+      <p:sp>
+        <p:nvSpPr>
+          <p:cNvPr id="100010" name="TextBox 2"/>
+          <p:cNvSpPr txBox="1"/>
+          <p:nvPr/>
+        </p:nvSpPr>
+        <p:spPr>
+          <a:xfrm xmlns:a="http://schemas.openxmlformats.org/drawingml/2006/main">
+            <a:off x="504000" y="558000"/>
+            <a:ext cx="11088000" cy="612000"/>
+          </a:xfrm>
+          <a:prstGeom xmlns:a="http://schemas.openxmlformats.org/drawingml/2006/main" prst="rect">
+            <a:avLst/>
+          </a:prstGeom>
+        </p:spPr>
+        <p:txBody>
+          <a:bodyPr xmlns:a="http://schemas.openxmlformats.org/drawingml/2006/main"/>
+          <a:lstStyle xmlns:a="http://schemas.openxmlformats.org/drawingml/2006/main"/>
+          <a:p xmlns:a="http://schemas.openxmlformats.org/drawingml/2006/main">
+            <a:r>
+              <a:rPr lang="en-US" sz="2800" b="1">
+                <a:solidFill>
+                  <a:srgbClr val="1A202C"/>
+                </a:solidFill>
+                <a:latin typeface="Calibri"/>
+                <a:ea typeface="Calibri"/>
+              </a:rPr>
+              <a:t>Situation &amp; decision card</a:t>
+            </a:r>
+          </a:p>
+        </p:txBody>
+      </p:sp>
+      <p:sp>
+        <p:nvSpPr>
+          <p:cNvPr id="100011" name="TextBox 3"/>
+          <p:cNvSpPr txBox="1"/>
+          <p:nvPr/>
+        </p:nvSpPr>
+        <p:spPr>
+          <a:xfrm xmlns:a="http://schemas.openxmlformats.org/drawingml/2006/main">
+            <a:off x="504000" y="1224000"/>
+            <a:ext cx="11088000" cy="4968000"/>
+          </a:xfrm>
+          <a:prstGeom xmlns:a="http://schemas.openxmlformats.org/drawingml/2006/main" prst="rect">
+            <a:avLst/>
+          </a:prstGeom>
+          <a:solidFill xmlns:a="http://schemas.openxmlformats.org/drawingml/2006/main">
+            <a:srgbClr val="FFFFFF"/>
+          </a:solidFill>
+        </p:spPr>
+        <p:txBody>
+          <a:bodyPr xmlns:a="http://schemas.openxmlformats.org/drawingml/2006/main"/>
+          <a:lstStyle xmlns:a="http://schemas.openxmlformats.org/drawingml/2006/main"/>
+          <a:p xmlns:a="http://schemas.openxmlformats.org/drawingml/2006/main">
+            <a:r>
+              <a:rPr lang="en-US" sz="1300" b="0">
+                <a:solidFill>
+                  <a:srgbClr val="1A202C"/>
+                </a:solidFill>
+                <a:latin typeface="Calibri"/>
+                <a:ea typeface="Calibri"/>
+              </a:rPr>
+              <a:t>Presenter: Alex Chen — EM, Atlas</a:t>
+            </a:r>
+          </a:p>
+          <a:p xmlns:a="http://schemas.openxmlformats.org/drawingml/2006/main">
+            <a:r>
+              <a:rPr lang="en-US" sz="1300" b="0">
+                <a:solidFill>
+                  <a:srgbClr val="1A202C"/>
+                </a:solidFill>
+                <a:latin typeface="Calibri"/>
+                <a:ea typeface="Calibri"/>
+              </a:rPr>
+              <a:t>Decision-maker: Morgan Lee — VP Eng (HC approval)</a:t>
+            </a:r>
+          </a:p>
+          <a:p xmlns:a="http://schemas.openxmlformats.org/drawingml/2006/main">
+            <a:r>
+              <a:rPr lang="en-US" sz="1300" b="0">
+                <a:solidFill>
+                  <a:srgbClr val="1A202C"/>
+                </a:solidFill>
+                <a:latin typeface="Calibri"/>
+                <a:ea typeface="Calibri"/>
+              </a:rPr>
+              <a:t>Audience: VP Eng; HRBP optional</a:t>
+            </a:r>
+          </a:p>
+          <a:p xmlns:a="http://schemas.openxmlformats.org/drawingml/2006/main">
+            <a:r>
+              <a:rPr lang="en-US" sz="1300" b="0">
+                <a:solidFill>
+                  <a:srgbClr val="1A202C"/>
+                </a:solidFill>
+                <a:latin typeface="Calibri"/>
+                <a:ea typeface="Calibri"/>
+              </a:rPr>
+              <a:t/>
+            </a:r>
+          </a:p>
+          <a:p xmlns:a="http://schemas.openxmlformats.org/drawingml/2006/main">
+            <a:r>
+              <a:rPr lang="en-US" sz="1300" b="0">
+                <a:solidFill>
+                  <a:srgbClr val="1A202C"/>
+                </a:solidFill>
+                <a:latin typeface="Calibri"/>
+                <a:ea typeface="Calibri"/>
+              </a:rPr>
+              <a:t>What just happened / context:</a:t>
+            </a:r>
+          </a:p>
+          <a:p xmlns:a="http://schemas.openxmlformats.org/drawingml/2006/main">
+            <a:r>
+              <a:rPr lang="en-US" sz="1300" b="0">
+                <a:solidFill>
+                  <a:srgbClr val="1A202C"/>
+                </a:solidFill>
+                <a:latin typeface="Calibri"/>
+                <a:ea typeface="Calibri"/>
+              </a:rPr>
+              <a:t>Post-silicon (5/15 boot) sample path is live. Priya is sole senior on HS IO DV. Q2 unplanned ~20%. USB3, sample board variants, and H2 WiFi DV collide on one person.</a:t>
+            </a:r>
+          </a:p>
+          <a:p xmlns:a="http://schemas.openxmlformats.org/drawingml/2006/main">
+            <a:r>
+              <a:rPr lang="en-US" sz="1300" b="0">
+                <a:solidFill>
+                  <a:srgbClr val="1A202C"/>
+                </a:solidFill>
+                <a:latin typeface="Calibri"/>
+                <a:ea typeface="Calibri"/>
+              </a:rPr>
+              <a:t/>
+            </a:r>
+          </a:p>
+          <a:p xmlns:a="http://schemas.openxmlformats.org/drawingml/2006/main">
+            <a:r>
+              <a:rPr lang="en-US" sz="1300" b="0">
+                <a:solidFill>
+                  <a:srgbClr val="1A202C"/>
+                </a:solidFill>
+                <a:latin typeface="Calibri"/>
+                <a:ea typeface="Calibri"/>
+              </a:rPr>
+              <a:t>Stakes if we get this wrong:</a:t>
+            </a:r>
+          </a:p>
+          <a:p xmlns:a="http://schemas.openxmlformats.org/drawingml/2006/main">
+            <a:r>
+              <a:rPr lang="en-US" sz="1300" b="0">
+                <a:solidFill>
+                  <a:srgbClr val="1A202C"/>
+                </a:solidFill>
+                <a:latin typeface="Calibri"/>
+                <a:ea typeface="Calibri"/>
+              </a:rPr>
+              <a:t>If no hire: USB3 → 7/15 (misses sample polish); Tier-1 may get only golden board; people yellow stays (deck 03).</a:t>
+            </a:r>
+          </a:p>
+          <a:p xmlns:a="http://schemas.openxmlformats.org/drawingml/2006/main">
+            <a:r>
+              <a:rPr lang="en-US" sz="1300" b="0">
+                <a:solidFill>
+                  <a:srgbClr val="1A202C"/>
+                </a:solidFill>
+                <a:latin typeface="Calibri"/>
+                <a:ea typeface="Calibri"/>
+              </a:rPr>
+              <a:t/>
+            </a:r>
+          </a:p>
+          <a:p xmlns:a="http://schemas.openxmlformats.org/drawingml/2006/main">
+            <a:r>
+              <a:rPr lang="en-US" sz="1300" b="0">
+                <a:solidFill>
+                  <a:srgbClr val="1A202C"/>
+                </a:solidFill>
+                <a:latin typeface="Calibri"/>
+                <a:ea typeface="Calibri"/>
+              </a:rPr>
+              <a:t>Decision needed:</a:t>
+            </a:r>
+          </a:p>
+          <a:p xmlns:a="http://schemas.openxmlformats.org/drawingml/2006/main">
+            <a:r>
+              <a:rPr lang="en-US" sz="1300" b="0">
+                <a:solidFill>
+                  <a:srgbClr val="1A202C"/>
+                </a:solidFill>
+                <a:latin typeface="Calibri"/>
+                <a:ea typeface="Calibri"/>
+              </a:rPr>
+              <a:t>Full +1 senior DV (REC) vs 6-mo contractor vs no hire + descope USB3 from sample.</a:t>
+            </a:r>
+          </a:p>
+          <a:p xmlns:a="http://schemas.openxmlformats.org/drawingml/2006/main">
+            <a:r>
+              <a:rPr lang="en-US" sz="1300" b="0">
+                <a:solidFill>
+                  <a:srgbClr val="1A202C"/>
+                </a:solidFill>
+                <a:latin typeface="Calibri"/>
+                <a:ea typeface="Calibri"/>
+              </a:rPr>
+              <a:t/>
+            </a:r>
+          </a:p>
+          <a:p xmlns:a="http://schemas.openxmlformats.org/drawingml/2006/main">
+            <a:r>
+              <a:rPr lang="en-US" sz="1300" b="0">
+                <a:solidFill>
+                  <a:srgbClr val="1A202C"/>
+                </a:solidFill>
+                <a:latin typeface="Calibri"/>
+                <a:ea typeface="Calibri"/>
+              </a:rPr>
+              <a:t>Recommendation: Full +1 senior DV; open req by 2026-05-22.</a:t>
+            </a:r>
+          </a:p>
+          <a:p xmlns:a="http://schemas.openxmlformats.org/drawingml/2006/main">
+            <a:r>
+              <a:rPr lang="en-US" sz="1300" b="0">
+                <a:solidFill>
+                  <a:srgbClr val="1A202C"/>
+                </a:solidFill>
+                <a:latin typeface="Calibri"/>
+                <a:ea typeface="Calibri"/>
+              </a:rPr>
+              <a:t>If YES: Offer ~6 weeks; productive mid-Q3; sample + USB3 + backup for Priya.</a:t>
+            </a:r>
+          </a:p>
+          <a:p xmlns:a="http://schemas.openxmlformats.org/drawingml/2006/main">
+            <a:r>
+              <a:rPr lang="en-US" sz="1300" b="0">
+                <a:solidFill>
+                  <a:srgbClr val="1A202C"/>
+                </a:solidFill>
+                <a:latin typeface="Calibri"/>
+                <a:ea typeface="Calibri"/>
+              </a:rPr>
+              <a:t>If NO / delay: Explicit trade-off: drop USB3 from sample or accept slip — not silent heroics.</a:t>
+            </a:r>
+          </a:p>
+          <a:p xmlns:a="http://schemas.openxmlformats.org/drawingml/2006/main">
+            <a:r>
+              <a:rPr lang="en-US" sz="1300" b="0">
+                <a:solidFill>
+                  <a:srgbClr val="1A202C"/>
+                </a:solidFill>
+                <a:latin typeface="Calibri"/>
+                <a:ea typeface="Calibri"/>
+              </a:rPr>
+              <a:t/>
+            </a:r>
+          </a:p>
+          <a:p xmlns:a="http://schemas.openxmlformats.org/drawingml/2006/main">
+            <a:r>
+              <a:rPr lang="en-US" sz="1300" b="0">
+                <a:solidFill>
+                  <a:srgbClr val="1A202C"/>
+                </a:solidFill>
+                <a:latin typeface="Calibri"/>
+                <a:ea typeface="Calibri"/>
+              </a:rPr>
+              <a:t>Decide by: 2026-05-20 (post-silicon week)</a:t>
+            </a:r>
+          </a:p>
+          <a:p xmlns:a="http://schemas.openxmlformats.org/drawingml/2006/main">
+            <a:r>
+              <a:rPr lang="en-US" sz="1300" b="0">
+                <a:solidFill>
+                  <a:srgbClr val="1A202C"/>
+                </a:solidFill>
+                <a:latin typeface="Calibri"/>
+                <a:ea typeface="Calibri"/>
+              </a:rPr>
+              <a:t>Arc prior: 02 green silicon · 03 people yellow</a:t>
+            </a:r>
+          </a:p>
+          <a:p xmlns:a="http://schemas.openxmlformats.org/drawingml/2006/main">
+            <a:r>
+              <a:rPr lang="en-US" sz="1300" b="0">
+                <a:solidFill>
+                  <a:srgbClr val="1A202C"/>
+                </a:solidFill>
+                <a:latin typeface="Calibri"/>
+                <a:ea typeface="Calibri"/>
+              </a:rPr>
+              <a:t>Arc next: 08/09 assume req opened; H2 capacity uses productive hire</a:t>
+            </a:r>
+          </a:p>
+        </p:txBody>
+      </p:sp>
+      <p:sp>
+        <p:nvSpPr>
+          <p:cNvPr id="100012" name="TextBox 4"/>
+          <p:cNvSpPr txBox="1"/>
+          <p:nvPr/>
+        </p:nvSpPr>
+        <p:spPr>
+          <a:xfrm xmlns:a="http://schemas.openxmlformats.org/drawingml/2006/main">
+            <a:off x="504000" y="6426000"/>
+            <a:ext cx="11088000" cy="306000"/>
+          </a:xfrm>
+          <a:prstGeom xmlns:a="http://schemas.openxmlformats.org/drawingml/2006/main" prst="rect">
+            <a:avLst/>
+          </a:prstGeom>
+        </p:spPr>
+        <p:txBody>
+          <a:bodyPr xmlns:a="http://schemas.openxmlformats.org/drawingml/2006/main"/>
+          <a:lstStyle xmlns:a="http://schemas.openxmlformats.org/drawingml/2006/main"/>
+          <a:p xmlns:a="http://schemas.openxmlformats.org/drawingml/2006/main">
+            <a:r>
+              <a:rPr lang="en-US" sz="1100" b="0">
+                <a:solidFill>
+                  <a:srgbClr val="718096"/>
+                </a:solidFill>
+                <a:latin typeface="Calibri"/>
+                <a:ea typeface="Calibri"/>
+              </a:rPr>
+              <a:t>Atlas Platform  ·  Project Aurora  ·  NovaSemi  ·  2026</a:t>
+            </a:r>
+          </a:p>
+        </p:txBody>
+      </p:sp>
+    </p:spTree>
+  </p:cSld>
+</p:sld>
+</file>
+
+<file path=ppt/slides/slide4.xml><?xml version="1.0" encoding="utf-8"?>
+<p:sld xmlns:p="http://schemas.openxmlformats.org/presentationml/2006/main">
   <p:cSld name="BLUF — approve 1 senior DV req">
     <p:bg>
       <p:bgPr>
@@ -1620,7 +2057,7 @@
       <p:grpSpPr/>
       <p:sp>
         <p:nvSpPr>
-          <p:cNvPr id="100009" name="TextBox 1"/>
+          <p:cNvPr id="100013" name="TextBox 1"/>
           <p:cNvSpPr txBox="1"/>
           <p:nvPr/>
         </p:nvSpPr>
@@ -1652,7 +2089,7 @@
       </p:sp>
       <p:sp>
         <p:nvSpPr>
-          <p:cNvPr id="100010" name="TextBox 2"/>
+          <p:cNvPr id="100014" name="TextBox 2"/>
           <p:cNvSpPr txBox="1"/>
           <p:nvPr/>
         </p:nvSpPr>
@@ -1684,7 +2121,7 @@
       </p:sp>
       <p:sp>
         <p:nvSpPr>
-          <p:cNvPr id="100011" name="TextBox 3"/>
+          <p:cNvPr id="100015" name="TextBox 3"/>
           <p:cNvSpPr txBox="1"/>
           <p:nvPr/>
         </p:nvSpPr>
@@ -1719,7 +2156,7 @@
       </p:sp>
       <p:sp>
         <p:nvSpPr>
-          <p:cNvPr id="100012" name="TextBox 4"/>
+          <p:cNvPr id="100016" name="TextBox 4"/>
           <p:cNvSpPr txBox="1"/>
           <p:nvPr/>
         </p:nvSpPr>
@@ -1802,7 +2239,7 @@
       </p:sp>
       <p:sp>
         <p:nvSpPr>
-          <p:cNvPr id="100013" name="TextBox 5"/>
+          <p:cNvPr id="100017" name="TextBox 5"/>
           <p:cNvSpPr txBox="1"/>
           <p:nvPr/>
         </p:nvSpPr>
@@ -1837,7 +2274,7 @@
 </p:sld>
 </file>
 
-<file path=ppt/slides/slide4.xml><?xml version="1.0" encoding="utf-8"?>
+<file path=ppt/slides/slide5.xml><?xml version="1.0" encoding="utf-8"?>
 <p:sld xmlns:p="http://schemas.openxmlformats.org/presentationml/2006/main">
   <p:cSld name="Linked roadmap outcomes">
     <p:bg>
@@ -1856,7 +2293,7 @@
       <p:grpSpPr/>
       <p:sp>
         <p:nvSpPr>
-          <p:cNvPr id="100014" name="TextBox 1"/>
+          <p:cNvPr id="100018" name="TextBox 1"/>
           <p:cNvSpPr txBox="1"/>
           <p:nvPr/>
         </p:nvSpPr>
@@ -1888,7 +2325,7 @@
       </p:sp>
       <p:sp>
         <p:nvSpPr>
-          <p:cNvPr id="100015" name="TextBox 2"/>
+          <p:cNvPr id="100019" name="TextBox 2"/>
           <p:cNvSpPr txBox="1"/>
           <p:nvPr/>
         </p:nvSpPr>
@@ -1983,7 +2420,7 @@
       </p:sp>
       <p:sp>
         <p:nvSpPr>
-          <p:cNvPr id="100016" name="TextBox 3"/>
+          <p:cNvPr id="100020" name="TextBox 3"/>
           <p:cNvSpPr txBox="1"/>
           <p:nvPr/>
         </p:nvSpPr>
@@ -2018,7 +2455,7 @@
 </p:sld>
 </file>
 
-<file path=ppt/slides/slide5.xml><?xml version="1.0" encoding="utf-8"?>
+<file path=ppt/slides/slide6.xml><?xml version="1.0" encoding="utf-8"?>
 <p:sld xmlns:p="http://schemas.openxmlformats.org/presentationml/2006/main">
   <p:cSld name="If declined (explicit)">
     <p:bg>
@@ -2037,7 +2474,7 @@
       <p:grpSpPr/>
       <p:sp>
         <p:nvSpPr>
-          <p:cNvPr id="100017" name="TextBox 1"/>
+          <p:cNvPr id="100021" name="TextBox 1"/>
           <p:cNvSpPr txBox="1"/>
           <p:nvPr/>
         </p:nvSpPr>
@@ -2069,7 +2506,7 @@
       </p:sp>
       <p:sp>
         <p:nvSpPr>
-          <p:cNvPr id="100018" name="TextBox 2"/>
+          <p:cNvPr id="100022" name="TextBox 2"/>
           <p:cNvSpPr txBox="1"/>
           <p:nvPr/>
         </p:nvSpPr>
@@ -2152,7 +2589,7 @@
       </p:sp>
       <p:sp>
         <p:nvSpPr>
-          <p:cNvPr id="100019" name="TextBox 3"/>
+          <p:cNvPr id="100023" name="TextBox 3"/>
           <p:cNvSpPr txBox="1"/>
           <p:nvPr/>
         </p:nvSpPr>
@@ -2187,7 +2624,7 @@
 </p:sld>
 </file>
 
-<file path=ppt/slides/slide6.xml><?xml version="1.0" encoding="utf-8"?>
+<file path=ppt/slides/slide7.xml><?xml version="1.0" encoding="utf-8"?>
 <p:sld xmlns:p="http://schemas.openxmlformats.org/presentationml/2006/main">
   <p:cSld name="Options &amp; recommendation">
     <p:bg>
@@ -2206,7 +2643,7 @@
       <p:grpSpPr/>
       <p:sp>
         <p:nvSpPr>
-          <p:cNvPr id="100020" name="TextBox 1"/>
+          <p:cNvPr id="100024" name="TextBox 1"/>
           <p:cNvSpPr txBox="1"/>
           <p:nvPr/>
         </p:nvSpPr>
@@ -2238,7 +2675,7 @@
       </p:sp>
       <p:sp>
         <p:nvSpPr>
-          <p:cNvPr id="100021" name="TextBox 2"/>
+          <p:cNvPr id="100025" name="TextBox 2"/>
           <p:cNvSpPr txBox="1"/>
           <p:nvPr/>
         </p:nvSpPr>
@@ -2270,7 +2707,7 @@
       </p:sp>
       <p:graphicFrame>
         <p:nvGraphicFramePr>
-          <p:cNvPr id="100022" name="Table 1"/>
+          <p:cNvPr id="100026" name="Table 1"/>
           <p:cNvGraphicFramePr/>
           <p:nvPr/>
         </p:nvGraphicFramePr>
@@ -2670,7 +3107,7 @@
       </p:graphicFrame>
       <p:sp>
         <p:nvSpPr>
-          <p:cNvPr id="100023" name="TextBox 3"/>
+          <p:cNvPr id="100027" name="TextBox 3"/>
           <p:cNvSpPr txBox="1"/>
           <p:nvPr/>
         </p:nvSpPr>
@@ -2705,7 +3142,7 @@
 </p:sld>
 </file>
 
-<file path=ppt/slides/slide7.xml><?xml version="1.0" encoding="utf-8"?>
+<file path=ppt/slides/slide8.xml><?xml version="1.0" encoding="utf-8"?>
 <p:sld xmlns:p="http://schemas.openxmlformats.org/presentationml/2006/main">
   <p:cSld name="Decision &amp; ask">
     <p:bg>
@@ -2724,7 +3161,7 @@
       <p:grpSpPr/>
       <p:sp>
         <p:nvSpPr>
-          <p:cNvPr id="100024" name="TextBox 1"/>
+          <p:cNvPr id="100028" name="TextBox 1"/>
           <p:cNvSpPr txBox="1"/>
           <p:nvPr/>
         </p:nvSpPr>
@@ -2756,7 +3193,7 @@
       </p:sp>
       <p:sp>
         <p:nvSpPr>
-          <p:cNvPr id="100025" name="TextBox 2"/>
+          <p:cNvPr id="100029" name="TextBox 2"/>
           <p:cNvSpPr txBox="1"/>
           <p:nvPr/>
         </p:nvSpPr>
@@ -2788,7 +3225,7 @@
       </p:sp>
       <p:sp>
         <p:nvSpPr>
-          <p:cNvPr id="100026" name="TextBox 3"/>
+          <p:cNvPr id="100030" name="TextBox 3"/>
           <p:cNvSpPr txBox="1"/>
           <p:nvPr/>
         </p:nvSpPr>
@@ -2847,7 +3284,7 @@
       </p:sp>
       <p:sp>
         <p:nvSpPr>
-          <p:cNvPr id="100027" name="TextBox 4"/>
+          <p:cNvPr id="100031" name="TextBox 4"/>
           <p:cNvSpPr txBox="1"/>
           <p:nvPr/>
         </p:nvSpPr>

--- a/skills/presentations/assets/pptx/examples/06-resource-request.pptx
+++ b/skills/presentations/assets/pptx/examples/06-resource-request.pptx
@@ -5,17 +5,17 @@
     <p:sldMasterId xmlns:r="http://schemas.openxmlformats.org/officeDocument/2006/relationships" id="2147483648" r:id="rId1"/>
   </p:sldMasterIdLst>
   <p:notesMasterIdLst>
-    <p:notesMasterId r:id="Rb6ae0f50b7374cb0"/>
+    <p:notesMasterId r:id="R34b1dda439b44d89"/>
   </p:notesMasterIdLst>
   <p:sldIdLst>
-    <p:sldId id="256" r:id="R76e8d9a4eab645ca"/>
-    <p:sldId id="257" r:id="Ra8abd65b485c4520"/>
-    <p:sldId id="258" r:id="R7dcf83517cd64f36"/>
-    <p:sldId id="259" r:id="Rff033af9f76847a9"/>
-    <p:sldId id="260" r:id="R9052f0aa29384dc7"/>
-    <p:sldId id="261" r:id="R07a30c5391e84880"/>
-    <p:sldId id="262" r:id="R150152652ee14f48"/>
-    <p:sldId id="263" r:id="Rf3de39681c7e4a40"/>
+    <p:sldId id="256" r:id="R832cc1c1ba214ac3"/>
+    <p:sldId id="257" r:id="Rdd9e7ae9629648da"/>
+    <p:sldId id="258" r:id="R066b9dc0a0ce4d56"/>
+    <p:sldId id="259" r:id="Rb01856dea8ee4ebf"/>
+    <p:sldId id="260" r:id="R755af231422f43a3"/>
+    <p:sldId id="261" r:id="Rf028909fabe2474f"/>
+    <p:sldId id="262" r:id="Rce315af069c646b8"/>
+    <p:sldId id="263" r:id="Rbd9939dc39f44c23"/>
   </p:sldIdLst>
   <p:sldSz cx="12192000" cy="6858000"/>
   <p:notesSz cx="6858000" cy="9144000"/>
@@ -1996,7 +1996,7 @@
                 <a:latin typeface="Calibri"/>
                 <a:ea typeface="Calibri"/>
               </a:rPr>
-              <a:t>Arc next: 08/09 assume req opened; H2 capacity uses productive hire</a:t>
+              <a:t>Arc next: Later decks 04–05/07/09/08 assume req opened; H2 uses productive hire</a:t>
             </a:r>
           </a:p>
         </p:txBody>

--- a/skills/presentations/assets/pptx/examples/06-resource-request.pptx
+++ b/skills/presentations/assets/pptx/examples/06-resource-request.pptx
@@ -5,17 +5,17 @@
     <p:sldMasterId xmlns:r="http://schemas.openxmlformats.org/officeDocument/2006/relationships" id="2147483648" r:id="rId1"/>
   </p:sldMasterIdLst>
   <p:notesMasterIdLst>
-    <p:notesMasterId r:id="R34b1dda439b44d89"/>
+    <p:notesMasterId r:id="R29a95c613a894dad"/>
   </p:notesMasterIdLst>
   <p:sldIdLst>
-    <p:sldId id="256" r:id="R832cc1c1ba214ac3"/>
-    <p:sldId id="257" r:id="Rdd9e7ae9629648da"/>
-    <p:sldId id="258" r:id="R066b9dc0a0ce4d56"/>
-    <p:sldId id="259" r:id="Rb01856dea8ee4ebf"/>
-    <p:sldId id="260" r:id="R755af231422f43a3"/>
-    <p:sldId id="261" r:id="Rf028909fabe2474f"/>
-    <p:sldId id="262" r:id="Rce315af069c646b8"/>
-    <p:sldId id="263" r:id="Rbd9939dc39f44c23"/>
+    <p:sldId id="256" r:id="R8094eb7bc053403d"/>
+    <p:sldId id="257" r:id="Rae676f3d75834944"/>
+    <p:sldId id="258" r:id="R1fb1d57aabb14635"/>
+    <p:sldId id="259" r:id="R1e449facf8524007"/>
+    <p:sldId id="260" r:id="R118516fba3db4b73"/>
+    <p:sldId id="261" r:id="R49b4e58dd2944083"/>
+    <p:sldId id="262" r:id="R269c271eeee14924"/>
+    <p:sldId id="263" r:id="Re3539135ccb7430e"/>
   </p:sldIdLst>
   <p:sldSz cx="12192000" cy="6858000"/>
   <p:notesSz cx="6858000" cy="9144000"/>
@@ -1615,7 +1615,19 @@
                 <a:latin typeface="Calibri"/>
                 <a:ea typeface="Calibri"/>
               </a:rPr>
-              <a:t>In-repo: skills/presentations/classic-public-cases.md</a:t>
+              <a:t>CONTENT TEMPLATE ONLY — do not copy visual design (colors, margins, fonts) as a brand system.</a:t>
+            </a:r>
+          </a:p>
+          <a:p xmlns:a="http://schemas.openxmlformats.org/drawingml/2006/main">
+            <a:r>
+              <a:rPr lang="en-US" sz="1500" b="0">
+                <a:solidFill>
+                  <a:srgbClr val="1A202C"/>
+                </a:solidFill>
+                <a:latin typeface="Calibri"/>
+                <a:ea typeface="Calibri"/>
+              </a:rPr>
+              <a:t>In-repo: skills/presentations/classic-public-cases.md · assets/README.md (agent notice)</a:t>
             </a:r>
           </a:p>
         </p:txBody>
